--- a/oes-example.pptx
+++ b/oes-example.pptx
@@ -5206,8 +5206,8 @@
           <a:noFill/>
         </p:spPr>
         <p:txBody>
-          <a:bodyPr wrap="square">
-            <a:spAutoFit/>
+          <a:bodyPr wrap="none">
+            <a:normAutofit/>
           </a:bodyPr>
           <a:lstStyle/>
           <a:p>
@@ -8482,8 +8482,8 @@
           <a:noFill/>
         </p:spPr>
         <p:txBody>
-          <a:bodyPr wrap="square">
-            <a:spAutoFit/>
+          <a:bodyPr wrap="none">
+            <a:normAutofit/>
           </a:bodyPr>
           <a:lstStyle/>
           <a:p>
@@ -8606,8 +8606,8 @@
           <a:noFill/>
         </p:spPr>
         <p:txBody>
-          <a:bodyPr wrap="square">
-            <a:spAutoFit/>
+          <a:bodyPr wrap="none">
+            <a:normAutofit/>
           </a:bodyPr>
           <a:lstStyle/>
           <a:p>
@@ -8730,8 +8730,8 @@
           <a:noFill/>
         </p:spPr>
         <p:txBody>
-          <a:bodyPr wrap="square">
-            <a:spAutoFit/>
+          <a:bodyPr wrap="none">
+            <a:normAutofit/>
           </a:bodyPr>
           <a:lstStyle/>
           <a:p>

--- a/oes-example.pptx
+++ b/oes-example.pptx
@@ -3272,44 +3272,9 @@
           </a:p>
         </p:txBody>
       </p:sp>
-      <p:sp>
-        <p:nvSpPr>
-          <p:cNvPr id="5" name="TextBox 4"/>
-          <p:cNvSpPr txBox="1"/>
-          <p:nvPr/>
-        </p:nvSpPr>
-        <p:spPr>
-          <a:xfrm>
-            <a:off x="603504" y="6291072"/>
-            <a:ext cx="2743200" cy="365760"/>
-          </a:xfrm>
-          <a:prstGeom prst="rect">
-            <a:avLst/>
-          </a:prstGeom>
-          <a:noFill/>
-        </p:spPr>
-        <p:txBody>
-          <a:bodyPr wrap="square">
-            <a:spAutoFit/>
-          </a:bodyPr>
-          <a:lstStyle/>
-          <a:p>
-            <a:pPr algn="l"/>
-            <a:r>
-              <a:rPr sz="1100" b="0" spc="120">
-                <a:solidFill>
-                  <a:srgbClr val="6B6B6B"/>
-                </a:solidFill>
-                <a:latin typeface="IBM Plex Mono"/>
-              </a:rPr>
-              <a:t>01</a:t>
-            </a:r>
-          </a:p>
-        </p:txBody>
-      </p:sp>
       <p:pic>
         <p:nvPicPr>
-          <p:cNvPr id="6" name="Picture 5" descr="oes-logo-green.png"/>
+          <p:cNvPr id="5" name="Picture 4" descr="oes-logo-green.png"/>
           <p:cNvPicPr>
             <a:picLocks noChangeAspect="1"/>
           </p:cNvPicPr>
@@ -4024,44 +3989,9 @@
           </a:p>
         </p:txBody>
       </p:sp>
-      <p:sp>
-        <p:nvSpPr>
-          <p:cNvPr id="18" name="TextBox 17"/>
-          <p:cNvSpPr txBox="1"/>
-          <p:nvPr/>
-        </p:nvSpPr>
-        <p:spPr>
-          <a:xfrm>
-            <a:off x="603504" y="6291072"/>
-            <a:ext cx="2743200" cy="365760"/>
-          </a:xfrm>
-          <a:prstGeom prst="rect">
-            <a:avLst/>
-          </a:prstGeom>
-          <a:noFill/>
-        </p:spPr>
-        <p:txBody>
-          <a:bodyPr wrap="square">
-            <a:spAutoFit/>
-          </a:bodyPr>
-          <a:lstStyle/>
-          <a:p>
-            <a:pPr algn="l"/>
-            <a:r>
-              <a:rPr sz="1100" b="0" spc="120">
-                <a:solidFill>
-                  <a:srgbClr val="6B6B6B"/>
-                </a:solidFill>
-                <a:latin typeface="IBM Plex Mono"/>
-              </a:rPr>
-              <a:t>10</a:t>
-            </a:r>
-          </a:p>
-        </p:txBody>
-      </p:sp>
       <p:pic>
         <p:nvPicPr>
-          <p:cNvPr id="19" name="Picture 18" descr="oes-logo-green.png"/>
+          <p:cNvPr id="18" name="Picture 17" descr="oes-logo-green.png"/>
           <p:cNvPicPr>
             <a:picLocks noChangeAspect="1"/>
           </p:cNvPicPr>
@@ -5024,44 +4954,9 @@
           </a:p>
         </p:txBody>
       </p:sp>
-      <p:sp>
-        <p:nvSpPr>
-          <p:cNvPr id="25" name="TextBox 24"/>
-          <p:cNvSpPr txBox="1"/>
-          <p:nvPr/>
-        </p:nvSpPr>
-        <p:spPr>
-          <a:xfrm>
-            <a:off x="603504" y="6291072"/>
-            <a:ext cx="2743200" cy="365760"/>
-          </a:xfrm>
-          <a:prstGeom prst="rect">
-            <a:avLst/>
-          </a:prstGeom>
-          <a:noFill/>
-        </p:spPr>
-        <p:txBody>
-          <a:bodyPr wrap="square">
-            <a:spAutoFit/>
-          </a:bodyPr>
-          <a:lstStyle/>
-          <a:p>
-            <a:pPr algn="l"/>
-            <a:r>
-              <a:rPr sz="1100" b="0" spc="120">
-                <a:solidFill>
-                  <a:srgbClr val="6B6B6B"/>
-                </a:solidFill>
-                <a:latin typeface="IBM Plex Mono"/>
-              </a:rPr>
-              <a:t>11</a:t>
-            </a:r>
-          </a:p>
-        </p:txBody>
-      </p:sp>
       <p:pic>
         <p:nvPicPr>
-          <p:cNvPr id="26" name="Picture 25" descr="oes-logo-green.png"/>
+          <p:cNvPr id="25" name="Picture 24" descr="oes-logo-green.png"/>
           <p:cNvPicPr>
             <a:picLocks noChangeAspect="1"/>
           </p:cNvPicPr>
@@ -5267,44 +5162,9 @@
           </a:p>
         </p:txBody>
       </p:sp>
-      <p:sp>
-        <p:nvSpPr>
-          <p:cNvPr id="6" name="TextBox 5"/>
-          <p:cNvSpPr txBox="1"/>
-          <p:nvPr/>
-        </p:nvSpPr>
-        <p:spPr>
-          <a:xfrm>
-            <a:off x="603504" y="6291072"/>
-            <a:ext cx="2743200" cy="365760"/>
-          </a:xfrm>
-          <a:prstGeom prst="rect">
-            <a:avLst/>
-          </a:prstGeom>
-          <a:noFill/>
-        </p:spPr>
-        <p:txBody>
-          <a:bodyPr wrap="square">
-            <a:spAutoFit/>
-          </a:bodyPr>
-          <a:lstStyle/>
-          <a:p>
-            <a:pPr algn="l"/>
-            <a:r>
-              <a:rPr sz="1100" b="0" spc="120">
-                <a:solidFill>
-                  <a:srgbClr val="6B6B6B"/>
-                </a:solidFill>
-                <a:latin typeface="IBM Plex Mono"/>
-              </a:rPr>
-              <a:t>12</a:t>
-            </a:r>
-          </a:p>
-        </p:txBody>
-      </p:sp>
       <p:pic>
         <p:nvPicPr>
-          <p:cNvPr id="7" name="Picture 6" descr="oes-logo-green.png"/>
+          <p:cNvPr id="6" name="Picture 5" descr="oes-logo-green.png"/>
           <p:cNvPicPr>
             <a:picLocks noChangeAspect="1"/>
           </p:cNvPicPr>
@@ -5995,44 +5855,9 @@
           </a:p>
         </p:txBody>
       </p:sp>
-      <p:sp>
-        <p:nvSpPr>
-          <p:cNvPr id="18" name="TextBox 17"/>
-          <p:cNvSpPr txBox="1"/>
-          <p:nvPr/>
-        </p:nvSpPr>
-        <p:spPr>
-          <a:xfrm>
-            <a:off x="603504" y="6291072"/>
-            <a:ext cx="2743200" cy="365760"/>
-          </a:xfrm>
-          <a:prstGeom prst="rect">
-            <a:avLst/>
-          </a:prstGeom>
-          <a:noFill/>
-        </p:spPr>
-        <p:txBody>
-          <a:bodyPr wrap="square">
-            <a:spAutoFit/>
-          </a:bodyPr>
-          <a:lstStyle/>
-          <a:p>
-            <a:pPr algn="l"/>
-            <a:r>
-              <a:rPr sz="1100" b="0" spc="120">
-                <a:solidFill>
-                  <a:srgbClr val="6B6B6B"/>
-                </a:solidFill>
-                <a:latin typeface="IBM Plex Mono"/>
-              </a:rPr>
-              <a:t>13</a:t>
-            </a:r>
-          </a:p>
-        </p:txBody>
-      </p:sp>
       <p:pic>
         <p:nvPicPr>
-          <p:cNvPr id="19" name="Picture 18" descr="oes-logo-green.png"/>
+          <p:cNvPr id="18" name="Picture 17" descr="oes-logo-green.png"/>
           <p:cNvPicPr>
             <a:picLocks noChangeAspect="1"/>
           </p:cNvPicPr>
@@ -6368,44 +6193,9 @@
           </a:p>
         </p:txBody>
       </p:sp>
-      <p:sp>
-        <p:nvSpPr>
-          <p:cNvPr id="9" name="TextBox 8"/>
-          <p:cNvSpPr txBox="1"/>
-          <p:nvPr/>
-        </p:nvSpPr>
-        <p:spPr>
-          <a:xfrm>
-            <a:off x="603504" y="6291072"/>
-            <a:ext cx="2743200" cy="365760"/>
-          </a:xfrm>
-          <a:prstGeom prst="rect">
-            <a:avLst/>
-          </a:prstGeom>
-          <a:noFill/>
-        </p:spPr>
-        <p:txBody>
-          <a:bodyPr wrap="square">
-            <a:spAutoFit/>
-          </a:bodyPr>
-          <a:lstStyle/>
-          <a:p>
-            <a:pPr algn="l"/>
-            <a:r>
-              <a:rPr sz="1100" b="0" spc="120">
-                <a:solidFill>
-                  <a:srgbClr val="6B6B6B"/>
-                </a:solidFill>
-                <a:latin typeface="IBM Plex Mono"/>
-              </a:rPr>
-              <a:t>14</a:t>
-            </a:r>
-          </a:p>
-        </p:txBody>
-      </p:sp>
       <p:pic>
         <p:nvPicPr>
-          <p:cNvPr id="10" name="Picture 9" descr="oes-logo-green.png"/>
+          <p:cNvPr id="9" name="Picture 8" descr="oes-logo-green.png"/>
           <p:cNvPicPr>
             <a:picLocks noChangeAspect="1"/>
           </p:cNvPicPr>
@@ -6629,44 +6419,9 @@
           </a:p>
         </p:txBody>
       </p:sp>
-      <p:sp>
-        <p:nvSpPr>
-          <p:cNvPr id="6" name="TextBox 5"/>
-          <p:cNvSpPr txBox="1"/>
-          <p:nvPr/>
-        </p:nvSpPr>
-        <p:spPr>
-          <a:xfrm>
-            <a:off x="603504" y="6291072"/>
-            <a:ext cx="2743200" cy="365760"/>
-          </a:xfrm>
-          <a:prstGeom prst="rect">
-            <a:avLst/>
-          </a:prstGeom>
-          <a:noFill/>
-        </p:spPr>
-        <p:txBody>
-          <a:bodyPr wrap="square">
-            <a:spAutoFit/>
-          </a:bodyPr>
-          <a:lstStyle/>
-          <a:p>
-            <a:pPr algn="l"/>
-            <a:r>
-              <a:rPr sz="1100" b="0" spc="120">
-                <a:solidFill>
-                  <a:srgbClr val="6B6B6B"/>
-                </a:solidFill>
-                <a:latin typeface="IBM Plex Mono"/>
-              </a:rPr>
-              <a:t>15</a:t>
-            </a:r>
-          </a:p>
-        </p:txBody>
-      </p:sp>
       <p:pic>
         <p:nvPicPr>
-          <p:cNvPr id="7" name="Picture 6" descr="oes-logo-green.png"/>
+          <p:cNvPr id="6" name="Picture 5" descr="oes-logo-green.png"/>
           <p:cNvPicPr>
             <a:picLocks noChangeAspect="1"/>
           </p:cNvPicPr>
@@ -6868,44 +6623,9 @@
           </a:p>
         </p:txBody>
       </p:sp>
-      <p:sp>
-        <p:nvSpPr>
-          <p:cNvPr id="6" name="TextBox 5"/>
-          <p:cNvSpPr txBox="1"/>
-          <p:nvPr/>
-        </p:nvSpPr>
-        <p:spPr>
-          <a:xfrm>
-            <a:off x="603504" y="6291072"/>
-            <a:ext cx="2743200" cy="365760"/>
-          </a:xfrm>
-          <a:prstGeom prst="rect">
-            <a:avLst/>
-          </a:prstGeom>
-          <a:noFill/>
-        </p:spPr>
-        <p:txBody>
-          <a:bodyPr wrap="square">
-            <a:spAutoFit/>
-          </a:bodyPr>
-          <a:lstStyle/>
-          <a:p>
-            <a:pPr algn="l"/>
-            <a:r>
-              <a:rPr sz="1100" b="0" spc="120">
-                <a:solidFill>
-                  <a:srgbClr val="BDBDBD"/>
-                </a:solidFill>
-                <a:latin typeface="IBM Plex Mono"/>
-              </a:rPr>
-              <a:t>02</a:t>
-            </a:r>
-          </a:p>
-        </p:txBody>
-      </p:sp>
       <p:pic>
         <p:nvPicPr>
-          <p:cNvPr id="7" name="Picture 6" descr="oes-logo-white.png"/>
+          <p:cNvPr id="6" name="Picture 5" descr="oes-logo-white.png"/>
           <p:cNvPicPr>
             <a:picLocks noChangeAspect="1"/>
           </p:cNvPicPr>
@@ -7448,44 +7168,9 @@
           </a:p>
         </p:txBody>
       </p:sp>
-      <p:sp>
-        <p:nvSpPr>
-          <p:cNvPr id="14" name="TextBox 13"/>
-          <p:cNvSpPr txBox="1"/>
-          <p:nvPr/>
-        </p:nvSpPr>
-        <p:spPr>
-          <a:xfrm>
-            <a:off x="603504" y="6291072"/>
-            <a:ext cx="2743200" cy="365760"/>
-          </a:xfrm>
-          <a:prstGeom prst="rect">
-            <a:avLst/>
-          </a:prstGeom>
-          <a:noFill/>
-        </p:spPr>
-        <p:txBody>
-          <a:bodyPr wrap="square">
-            <a:spAutoFit/>
-          </a:bodyPr>
-          <a:lstStyle/>
-          <a:p>
-            <a:pPr algn="l"/>
-            <a:r>
-              <a:rPr sz="1100" b="0" spc="120">
-                <a:solidFill>
-                  <a:srgbClr val="6B6B6B"/>
-                </a:solidFill>
-                <a:latin typeface="IBM Plex Mono"/>
-              </a:rPr>
-              <a:t>03</a:t>
-            </a:r>
-          </a:p>
-        </p:txBody>
-      </p:sp>
       <p:pic>
         <p:nvPicPr>
-          <p:cNvPr id="15" name="Picture 14" descr="oes-logo-green.png"/>
+          <p:cNvPr id="14" name="Picture 13" descr="oes-logo-green.png"/>
           <p:cNvPicPr>
             <a:picLocks noChangeAspect="1"/>
           </p:cNvPicPr>
@@ -7888,44 +7573,9 @@
           </a:p>
         </p:txBody>
       </p:sp>
-      <p:sp>
-        <p:nvSpPr>
-          <p:cNvPr id="11" name="TextBox 10"/>
-          <p:cNvSpPr txBox="1"/>
-          <p:nvPr/>
-        </p:nvSpPr>
-        <p:spPr>
-          <a:xfrm>
-            <a:off x="603504" y="6291072"/>
-            <a:ext cx="2743200" cy="365760"/>
-          </a:xfrm>
-          <a:prstGeom prst="rect">
-            <a:avLst/>
-          </a:prstGeom>
-          <a:noFill/>
-        </p:spPr>
-        <p:txBody>
-          <a:bodyPr wrap="square">
-            <a:spAutoFit/>
-          </a:bodyPr>
-          <a:lstStyle/>
-          <a:p>
-            <a:pPr algn="l"/>
-            <a:r>
-              <a:rPr sz="1100" b="0" spc="120">
-                <a:solidFill>
-                  <a:srgbClr val="6B6B6B"/>
-                </a:solidFill>
-                <a:latin typeface="IBM Plex Mono"/>
-              </a:rPr>
-              <a:t>04</a:t>
-            </a:r>
-          </a:p>
-        </p:txBody>
-      </p:sp>
       <p:pic>
         <p:nvPicPr>
-          <p:cNvPr id="12" name="Picture 11" descr="oes-logo-green.png"/>
+          <p:cNvPr id="11" name="Picture 10" descr="oes-logo-green.png"/>
           <p:cNvPicPr>
             <a:picLocks noChangeAspect="1"/>
           </p:cNvPicPr>
@@ -8171,44 +7821,9 @@
           </a:p>
         </p:txBody>
       </p:sp>
-      <p:sp>
-        <p:nvSpPr>
-          <p:cNvPr id="7" name="TextBox 6"/>
-          <p:cNvSpPr txBox="1"/>
-          <p:nvPr/>
-        </p:nvSpPr>
-        <p:spPr>
-          <a:xfrm>
-            <a:off x="603504" y="6291072"/>
-            <a:ext cx="2743200" cy="365760"/>
-          </a:xfrm>
-          <a:prstGeom prst="rect">
-            <a:avLst/>
-          </a:prstGeom>
-          <a:noFill/>
-        </p:spPr>
-        <p:txBody>
-          <a:bodyPr wrap="square">
-            <a:spAutoFit/>
-          </a:bodyPr>
-          <a:lstStyle/>
-          <a:p>
-            <a:pPr algn="l"/>
-            <a:r>
-              <a:rPr sz="1100" b="0" spc="120">
-                <a:solidFill>
-                  <a:srgbClr val="6B6B6B"/>
-                </a:solidFill>
-                <a:latin typeface="IBM Plex Mono"/>
-              </a:rPr>
-              <a:t>05</a:t>
-            </a:r>
-          </a:p>
-        </p:txBody>
-      </p:sp>
       <p:pic>
         <p:nvPicPr>
-          <p:cNvPr id="8" name="Picture 7" descr="oes-logo-green.png"/>
+          <p:cNvPr id="7" name="Picture 6" descr="oes-logo-green.png"/>
           <p:cNvPicPr>
             <a:picLocks noChangeAspect="1"/>
           </p:cNvPicPr>
@@ -8787,44 +8402,9 @@
           </a:p>
         </p:txBody>
       </p:sp>
-      <p:sp>
-        <p:nvSpPr>
-          <p:cNvPr id="15" name="TextBox 14"/>
-          <p:cNvSpPr txBox="1"/>
-          <p:nvPr/>
-        </p:nvSpPr>
-        <p:spPr>
-          <a:xfrm>
-            <a:off x="603504" y="6291072"/>
-            <a:ext cx="2743200" cy="365760"/>
-          </a:xfrm>
-          <a:prstGeom prst="rect">
-            <a:avLst/>
-          </a:prstGeom>
-          <a:noFill/>
-        </p:spPr>
-        <p:txBody>
-          <a:bodyPr wrap="square">
-            <a:spAutoFit/>
-          </a:bodyPr>
-          <a:lstStyle/>
-          <a:p>
-            <a:pPr algn="l"/>
-            <a:r>
-              <a:rPr sz="1100" b="0" spc="120">
-                <a:solidFill>
-                  <a:srgbClr val="6B6B6B"/>
-                </a:solidFill>
-                <a:latin typeface="IBM Plex Mono"/>
-              </a:rPr>
-              <a:t>06</a:t>
-            </a:r>
-          </a:p>
-        </p:txBody>
-      </p:sp>
       <p:pic>
         <p:nvPicPr>
-          <p:cNvPr id="16" name="Picture 15" descr="oes-logo-green.png"/>
+          <p:cNvPr id="15" name="Picture 14" descr="oes-logo-green.png"/>
           <p:cNvPicPr>
             <a:picLocks noChangeAspect="1"/>
           </p:cNvPicPr>
@@ -9435,44 +9015,9 @@
           </a:graphicData>
         </a:graphic>
       </p:graphicFrame>
-      <p:sp>
-        <p:nvSpPr>
-          <p:cNvPr id="7" name="TextBox 6"/>
-          <p:cNvSpPr txBox="1"/>
-          <p:nvPr/>
-        </p:nvSpPr>
-        <p:spPr>
-          <a:xfrm>
-            <a:off x="603504" y="6291072"/>
-            <a:ext cx="2743200" cy="365760"/>
-          </a:xfrm>
-          <a:prstGeom prst="rect">
-            <a:avLst/>
-          </a:prstGeom>
-          <a:noFill/>
-        </p:spPr>
-        <p:txBody>
-          <a:bodyPr wrap="square">
-            <a:spAutoFit/>
-          </a:bodyPr>
-          <a:lstStyle/>
-          <a:p>
-            <a:pPr algn="l"/>
-            <a:r>
-              <a:rPr sz="1100" b="0" spc="120">
-                <a:solidFill>
-                  <a:srgbClr val="6B6B6B"/>
-                </a:solidFill>
-                <a:latin typeface="IBM Plex Mono"/>
-              </a:rPr>
-              <a:t>07</a:t>
-            </a:r>
-          </a:p>
-        </p:txBody>
-      </p:sp>
       <p:pic>
         <p:nvPicPr>
-          <p:cNvPr id="8" name="Picture 7" descr="oes-logo-green.png"/>
+          <p:cNvPr id="7" name="Picture 6" descr="oes-logo-green.png"/>
           <p:cNvPicPr>
             <a:picLocks noChangeAspect="1"/>
           </p:cNvPicPr>
@@ -10139,44 +9684,9 @@
           </a:p>
         </p:txBody>
       </p:sp>
-      <p:sp>
-        <p:nvSpPr>
-          <p:cNvPr id="18" name="TextBox 17"/>
-          <p:cNvSpPr txBox="1"/>
-          <p:nvPr/>
-        </p:nvSpPr>
-        <p:spPr>
-          <a:xfrm>
-            <a:off x="603504" y="6291072"/>
-            <a:ext cx="2743200" cy="365760"/>
-          </a:xfrm>
-          <a:prstGeom prst="rect">
-            <a:avLst/>
-          </a:prstGeom>
-          <a:noFill/>
-        </p:spPr>
-        <p:txBody>
-          <a:bodyPr wrap="square">
-            <a:spAutoFit/>
-          </a:bodyPr>
-          <a:lstStyle/>
-          <a:p>
-            <a:pPr algn="l"/>
-            <a:r>
-              <a:rPr sz="1100" b="0" spc="120">
-                <a:solidFill>
-                  <a:srgbClr val="6B6B6B"/>
-                </a:solidFill>
-                <a:latin typeface="IBM Plex Mono"/>
-              </a:rPr>
-              <a:t>08</a:t>
-            </a:r>
-          </a:p>
-        </p:txBody>
-      </p:sp>
       <p:pic>
         <p:nvPicPr>
-          <p:cNvPr id="19" name="Picture 18" descr="oes-logo-green.png"/>
+          <p:cNvPr id="18" name="Picture 17" descr="oes-logo-green.png"/>
           <p:cNvPicPr>
             <a:picLocks noChangeAspect="1"/>
           </p:cNvPicPr>
